--- a/data-eng/decks/w1d5s2.pptx
+++ b/data-eng/decks/w1d5s2.pptx
@@ -9472,7 +9472,7 @@
                 <a:ea typeface="Pretendard"/>
                 <a:cs typeface="Pretendard"/>
               </a:rPr>
-              <a:t>up -d → ps → curl → logs web → down</a:t>
+              <a:t>up -d → ps → curl → logs web → down → ps -a</a:t>
             </a:r>
           </a:p>
         </p:txBody>
@@ -9513,7 +9513,7 @@
                 <a:ea typeface="Pretendard"/>
                 <a:cs typeface="Pretendard"/>
               </a:rPr>
-              <a:t>명령 다섯 개의 손맛을 익힌다 — curl http://localhost:8080</a:t>
+              <a:t>끝의 compose ps -a 가 제목 줄만이면 정리 끝</a:t>
             </a:r>
           </a:p>
         </p:txBody>
@@ -9700,7 +9700,7 @@
                 <a:ea typeface="Pretendard"/>
                 <a:cs typeface="Pretendard"/>
               </a:rPr>
-              <a:t>ps 에 web 이 running · curl 에 Welcome to nginx! · down 뒤 docker ps -a 에 아무것도 없음</a:t>
+              <a:t>ps 에 web 이 running · curl 에 Welcome to nginx! · down 뒤 compose ps -a 는 제목 줄만</a:t>
             </a:r>
           </a:p>
         </p:txBody>

--- a/data-eng/decks/w1d5s2.pptx
+++ b/data-eng/decks/w1d5s2.pptx
@@ -11886,7 +11886,7 @@
                 <a:ea typeface="Pretendard"/>
                 <a:cs typeface="Pretendard"/>
               </a:rPr>
-              <a:t>dpage/pgadmin4</a:t>
+              <a:t>dpage/pgadmin4:9.18</a:t>
             </a:r>
           </a:p>
         </p:txBody>

--- a/data-eng/decks/w1d5s2.pptx
+++ b/data-eng/decks/w1d5s2.pptx
@@ -3941,7 +3941,7 @@
                 <a:ea typeface="Pretendard"/>
                 <a:cs typeface="Pretendard"/>
               </a:rPr>
-              <a:t>ps 에 web running · curl 에 Welcome to nginx! · down 뒤 남는 것 없음</a:t>
+              <a:t>ps 에 web running · curl 에 Welcome to nginx! · down 뒤 compose ps -a 는 제목 줄만</a:t>
             </a:r>
           </a:p>
         </p:txBody>
@@ -12493,7 +12493,7 @@
                 <a:ea typeface="Pretendard"/>
                 <a:cs typeface="Pretendard"/>
               </a:rPr>
-              <a:t>쓰고 나서 docker compose config — 실행하지 않고 해석만 한다. ls app 에 Dockerfile 이 보여야 build 가 된다</a:t>
+              <a:t>config 로 해석만 먼저 — ls app 에 Dockerfile 이 있어야 build 된다. pgdata 는 실제로 week1_pgdata(폴더 이름이 붙는다) — 3차시 pgdata 와 다른 볼륨</a:t>
             </a:r>
           </a:p>
         </p:txBody>

--- a/data-eng/decks/w1d5s2.pptx
+++ b/data-eng/decks/w1d5s2.pptx
@@ -3100,7 +3100,7 @@
       <p:grpSpPr/>
       <p:sp>
         <p:nvSpPr>
-          <p:cNvPr id="2" name="Oval 1"/>
+          <p:cNvPr id="2" name="deckgen:decor"/>
           <p:cNvSpPr/>
           <p:nvPr/>
         </p:nvSpPr>
@@ -3130,7 +3130,7 @@
       </p:sp>
       <p:sp>
         <p:nvSpPr>
-          <p:cNvPr id="3" name="Oval 2"/>
+          <p:cNvPr id="3" name="deckgen:decor"/>
           <p:cNvSpPr/>
           <p:nvPr/>
         </p:nvSpPr>
@@ -3160,7 +3160,7 @@
       </p:sp>
       <p:sp>
         <p:nvSpPr>
-          <p:cNvPr id="4" name="Oval 3"/>
+          <p:cNvPr id="4" name="deckgen:decor"/>
           <p:cNvSpPr/>
           <p:nvPr/>
         </p:nvSpPr>
@@ -3190,7 +3190,7 @@
       </p:sp>
       <p:sp>
         <p:nvSpPr>
-          <p:cNvPr id="5" name="Rectangle 4"/>
+          <p:cNvPr id="5" name="deckgen:decor"/>
           <p:cNvSpPr/>
           <p:nvPr/>
         </p:nvSpPr>
@@ -3220,7 +3220,7 @@
       </p:sp>
       <p:sp>
         <p:nvSpPr>
-          <p:cNvPr id="6" name="Oval 5"/>
+          <p:cNvPr id="6" name="deckgen:decor"/>
           <p:cNvSpPr/>
           <p:nvPr/>
         </p:nvSpPr>
@@ -3250,7 +3250,7 @@
       </p:sp>
       <p:sp>
         <p:nvSpPr>
-          <p:cNvPr id="7" name="Oval 6"/>
+          <p:cNvPr id="7" name="deckgen:decor"/>
           <p:cNvSpPr/>
           <p:nvPr/>
         </p:nvSpPr>
@@ -3280,7 +3280,7 @@
       </p:sp>
       <p:sp>
         <p:nvSpPr>
-          <p:cNvPr id="8" name="Oval 7"/>
+          <p:cNvPr id="8" name="deckgen:decor"/>
           <p:cNvSpPr/>
           <p:nvPr/>
         </p:nvSpPr>
@@ -3310,7 +3310,7 @@
       </p:sp>
       <p:sp>
         <p:nvSpPr>
-          <p:cNvPr id="9" name="Oval 8"/>
+          <p:cNvPr id="9" name="deckgen:decor"/>
           <p:cNvSpPr/>
           <p:nvPr/>
         </p:nvSpPr>
@@ -3340,7 +3340,7 @@
       </p:sp>
       <p:sp>
         <p:nvSpPr>
-          <p:cNvPr id="10" name="Rectangle 9"/>
+          <p:cNvPr id="10" name="deckgen:decor"/>
           <p:cNvSpPr/>
           <p:nvPr/>
         </p:nvSpPr>
@@ -3600,7 +3600,7 @@
       <p:grpSpPr/>
       <p:sp>
         <p:nvSpPr>
-          <p:cNvPr id="2" name="Oval 1"/>
+          <p:cNvPr id="2" name="deckgen:decor"/>
           <p:cNvSpPr/>
           <p:nvPr/>
         </p:nvSpPr>
@@ -3630,7 +3630,7 @@
       </p:sp>
       <p:sp>
         <p:nvSpPr>
-          <p:cNvPr id="3" name="Oval 2"/>
+          <p:cNvPr id="3" name="deckgen:decor"/>
           <p:cNvSpPr/>
           <p:nvPr/>
         </p:nvSpPr>
@@ -3660,7 +3660,7 @@
       </p:sp>
       <p:sp>
         <p:nvSpPr>
-          <p:cNvPr id="4" name="Oval 3"/>
+          <p:cNvPr id="4" name="deckgen:decor"/>
           <p:cNvSpPr/>
           <p:nvPr/>
         </p:nvSpPr>
@@ -4662,7 +4662,7 @@
       <p:grpSpPr/>
       <p:sp>
         <p:nvSpPr>
-          <p:cNvPr id="2" name="Oval 1"/>
+          <p:cNvPr id="2" name="deckgen:decor"/>
           <p:cNvSpPr/>
           <p:nvPr/>
         </p:nvSpPr>
@@ -4692,7 +4692,7 @@
       </p:sp>
       <p:sp>
         <p:nvSpPr>
-          <p:cNvPr id="3" name="Oval 2"/>
+          <p:cNvPr id="3" name="deckgen:decor"/>
           <p:cNvSpPr/>
           <p:nvPr/>
         </p:nvSpPr>
@@ -5469,7 +5469,7 @@
       <p:grpSpPr/>
       <p:sp>
         <p:nvSpPr>
-          <p:cNvPr id="2" name="Oval 1"/>
+          <p:cNvPr id="2" name="deckgen:decor"/>
           <p:cNvSpPr/>
           <p:nvPr/>
         </p:nvSpPr>
@@ -5499,7 +5499,7 @@
       </p:sp>
       <p:sp>
         <p:nvSpPr>
-          <p:cNvPr id="3" name="Oval 2"/>
+          <p:cNvPr id="3" name="deckgen:decor"/>
           <p:cNvSpPr/>
           <p:nvPr/>
         </p:nvSpPr>
@@ -5529,7 +5529,7 @@
       </p:sp>
       <p:sp>
         <p:nvSpPr>
-          <p:cNvPr id="4" name="Oval 3"/>
+          <p:cNvPr id="4" name="deckgen:decor"/>
           <p:cNvSpPr/>
           <p:nvPr/>
         </p:nvSpPr>
@@ -6460,7 +6460,7 @@
       <p:grpSpPr/>
       <p:sp>
         <p:nvSpPr>
-          <p:cNvPr id="2" name="Oval 1"/>
+          <p:cNvPr id="2" name="deckgen:decor"/>
           <p:cNvSpPr/>
           <p:nvPr/>
         </p:nvSpPr>
@@ -6490,7 +6490,7 @@
       </p:sp>
       <p:sp>
         <p:nvSpPr>
-          <p:cNvPr id="3" name="Oval 2"/>
+          <p:cNvPr id="3" name="deckgen:decor"/>
           <p:cNvSpPr/>
           <p:nvPr/>
         </p:nvSpPr>
@@ -6520,7 +6520,7 @@
       </p:sp>
       <p:sp>
         <p:nvSpPr>
-          <p:cNvPr id="4" name="Oval 3"/>
+          <p:cNvPr id="4" name="deckgen:decor"/>
           <p:cNvSpPr/>
           <p:nvPr/>
         </p:nvSpPr>
@@ -6801,7 +6801,7 @@
                 <a:ea typeface="Pretendard"/>
                 <a:cs typeface="Pretendard"/>
               </a:rPr>
-              <a:t>1 최소 Compose</a:t>
+              <a:t>1. 최소 Compose</a:t>
             </a:r>
           </a:p>
         </p:txBody>
@@ -6947,7 +6947,7 @@
                 <a:ea typeface="Pretendard"/>
                 <a:cs typeface="Pretendard"/>
               </a:rPr>
-              <a:t>2 둘로 늘리기</a:t>
+              <a:t>2. 둘로 늘리기</a:t>
             </a:r>
           </a:p>
         </p:txBody>
@@ -7093,7 +7093,7 @@
                 <a:ea typeface="Pretendard"/>
                 <a:cs typeface="Pretendard"/>
               </a:rPr>
-              <a:t>3 통합 yml 작성</a:t>
+              <a:t>3. 통합 yml 작성</a:t>
             </a:r>
           </a:p>
         </p:txBody>
@@ -7239,7 +7239,7 @@
                 <a:ea typeface="Pretendard"/>
                 <a:cs typeface="Pretendard"/>
               </a:rPr>
-              <a:t>4 한 번에 기동</a:t>
+              <a:t>4. 한 번에 기동</a:t>
             </a:r>
           </a:p>
         </p:txBody>
@@ -7385,7 +7385,7 @@
                 <a:ea typeface="Pretendard"/>
                 <a:cs typeface="Pretendard"/>
               </a:rPr>
-              <a:t>5 연결 확인</a:t>
+              <a:t>5. 연결 확인</a:t>
             </a:r>
           </a:p>
         </p:txBody>
@@ -7563,7 +7563,7 @@
       <p:grpSpPr/>
       <p:sp>
         <p:nvSpPr>
-          <p:cNvPr id="2" name="Oval 1"/>
+          <p:cNvPr id="2" name="deckgen:decor"/>
           <p:cNvSpPr/>
           <p:nvPr/>
         </p:nvSpPr>
@@ -7593,7 +7593,7 @@
       </p:sp>
       <p:sp>
         <p:nvSpPr>
-          <p:cNvPr id="3" name="Oval 2"/>
+          <p:cNvPr id="3" name="deckgen:decor"/>
           <p:cNvSpPr/>
           <p:nvPr/>
         </p:nvSpPr>
@@ -7623,7 +7623,7 @@
       </p:sp>
       <p:sp>
         <p:nvSpPr>
-          <p:cNvPr id="4" name="Oval 3"/>
+          <p:cNvPr id="4" name="deckgen:decor"/>
           <p:cNvSpPr/>
           <p:nvPr/>
         </p:nvSpPr>
@@ -8944,7 +8944,7 @@
       <p:grpSpPr/>
       <p:sp>
         <p:nvSpPr>
-          <p:cNvPr id="2" name="Oval 1"/>
+          <p:cNvPr id="2" name="deckgen:decor"/>
           <p:cNvSpPr/>
           <p:nvPr/>
         </p:nvSpPr>
@@ -8974,7 +8974,7 @@
       </p:sp>
       <p:sp>
         <p:nvSpPr>
-          <p:cNvPr id="3" name="Oval 2"/>
+          <p:cNvPr id="3" name="deckgen:decor"/>
           <p:cNvSpPr/>
           <p:nvPr/>
         </p:nvSpPr>
@@ -9004,7 +9004,7 @@
       </p:sp>
       <p:sp>
         <p:nvSpPr>
-          <p:cNvPr id="4" name="Oval 3"/>
+          <p:cNvPr id="4" name="deckgen:decor"/>
           <p:cNvSpPr/>
           <p:nvPr/>
         </p:nvSpPr>
@@ -10042,7 +10042,7 @@
       <p:grpSpPr/>
       <p:sp>
         <p:nvSpPr>
-          <p:cNvPr id="2" name="Oval 1"/>
+          <p:cNvPr id="2" name="deckgen:decor"/>
           <p:cNvSpPr/>
           <p:nvPr/>
         </p:nvSpPr>
@@ -10072,7 +10072,7 @@
       </p:sp>
       <p:sp>
         <p:nvSpPr>
-          <p:cNvPr id="3" name="Oval 2"/>
+          <p:cNvPr id="3" name="deckgen:decor"/>
           <p:cNvSpPr/>
           <p:nvPr/>
         </p:nvSpPr>
@@ -10102,7 +10102,7 @@
       </p:sp>
       <p:sp>
         <p:nvSpPr>
-          <p:cNvPr id="4" name="Oval 3"/>
+          <p:cNvPr id="4" name="deckgen:decor"/>
           <p:cNvSpPr/>
           <p:nvPr/>
         </p:nvSpPr>
@@ -11103,7 +11103,7 @@
       <p:grpSpPr/>
       <p:sp>
         <p:nvSpPr>
-          <p:cNvPr id="2" name="Oval 1"/>
+          <p:cNvPr id="2" name="deckgen:decor"/>
           <p:cNvSpPr/>
           <p:nvPr/>
         </p:nvSpPr>
@@ -11133,7 +11133,7 @@
       </p:sp>
       <p:sp>
         <p:nvSpPr>
-          <p:cNvPr id="3" name="Oval 2"/>
+          <p:cNvPr id="3" name="deckgen:decor"/>
           <p:cNvSpPr/>
           <p:nvPr/>
         </p:nvSpPr>
@@ -11163,7 +11163,7 @@
       </p:sp>
       <p:sp>
         <p:nvSpPr>
-          <p:cNvPr id="4" name="Oval 3"/>
+          <p:cNvPr id="4" name="deckgen:decor"/>
           <p:cNvSpPr/>
           <p:nvPr/>
         </p:nvSpPr>
@@ -12630,7 +12630,7 @@
       <p:grpSpPr/>
       <p:sp>
         <p:nvSpPr>
-          <p:cNvPr id="2" name="Oval 1"/>
+          <p:cNvPr id="2" name="deckgen:decor"/>
           <p:cNvSpPr/>
           <p:nvPr/>
         </p:nvSpPr>
@@ -12660,7 +12660,7 @@
       </p:sp>
       <p:sp>
         <p:nvSpPr>
-          <p:cNvPr id="3" name="Oval 2"/>
+          <p:cNvPr id="3" name="deckgen:decor"/>
           <p:cNvSpPr/>
           <p:nvPr/>
         </p:nvSpPr>
@@ -12690,7 +12690,7 @@
       </p:sp>
       <p:sp>
         <p:nvSpPr>
-          <p:cNvPr id="4" name="Oval 3"/>
+          <p:cNvPr id="4" name="deckgen:decor"/>
           <p:cNvSpPr/>
           <p:nvPr/>
         </p:nvSpPr>
@@ -13844,7 +13844,7 @@
       <p:grpSpPr/>
       <p:sp>
         <p:nvSpPr>
-          <p:cNvPr id="2" name="Oval 1"/>
+          <p:cNvPr id="2" name="deckgen:decor"/>
           <p:cNvSpPr/>
           <p:nvPr/>
         </p:nvSpPr>
@@ -13874,7 +13874,7 @@
       </p:sp>
       <p:sp>
         <p:nvSpPr>
-          <p:cNvPr id="3" name="Oval 2"/>
+          <p:cNvPr id="3" name="deckgen:decor"/>
           <p:cNvSpPr/>
           <p:nvPr/>
         </p:nvSpPr>
@@ -13904,7 +13904,7 @@
       </p:sp>
       <p:sp>
         <p:nvSpPr>
-          <p:cNvPr id="4" name="Oval 3"/>
+          <p:cNvPr id="4" name="deckgen:decor"/>
           <p:cNvSpPr/>
           <p:nvPr/>
         </p:nvSpPr>
